--- a/Module 1 Project - Presentation.pptx
+++ b/Module 1 Project - Presentation.pptx
@@ -1406,7 +1406,7 @@
       <dgm:spPr/>
     </dgm:pt>
     <dgm:pt modelId="{00380C87-F618-4E01-A15F-75EFFC39D6ED}" type="pres">
-      <dgm:prSet presAssocID="{7906F10B-7BFE-47DE-B13C-6B566C568F5A}" presName="node" presStyleLbl="node1" presStyleIdx="2" presStyleCnt="6" custScaleY="149242">
+      <dgm:prSet presAssocID="{7906F10B-7BFE-47DE-B13C-6B566C568F5A}" presName="node" presStyleLbl="node1" presStyleIdx="2" presStyleCnt="6" custScaleY="79744">
         <dgm:presLayoutVars>
           <dgm:bulletEnabled val="1"/>
         </dgm:presLayoutVars>
@@ -1540,8 +1540,8 @@
       </dsp:nvSpPr>
       <dsp:spPr>
         <a:xfrm>
-          <a:off x="1304687" y="322861"/>
-          <a:ext cx="2183355" cy="1310013"/>
+          <a:off x="543638" y="83"/>
+          <a:ext cx="2654091" cy="1592454"/>
         </a:xfrm>
         <a:prstGeom prst="roundRect">
           <a:avLst>
@@ -1627,8 +1627,8 @@
         </a:p>
       </dsp:txBody>
       <dsp:txXfrm>
-        <a:off x="1343056" y="361230"/>
-        <a:ext cx="2106617" cy="1233275"/>
+        <a:off x="590279" y="46724"/>
+        <a:ext cx="2560809" cy="1499172"/>
       </dsp:txXfrm>
     </dsp:sp>
     <dsp:sp modelId="{57FBF189-3501-46F3-AB2E-65FBD65E9D21}">
@@ -1638,8 +1638,8 @@
       </dsp:nvSpPr>
       <dsp:spPr>
         <a:xfrm>
-          <a:off x="3680178" y="707132"/>
-          <a:ext cx="462871" cy="541472"/>
+          <a:off x="3431290" y="467203"/>
+          <a:ext cx="562667" cy="658214"/>
         </a:xfrm>
         <a:prstGeom prst="rightArrow">
           <a:avLst>
@@ -1697,8 +1697,8 @@
         </a:p>
       </dsp:txBody>
       <dsp:txXfrm>
-        <a:off x="3680178" y="815426"/>
-        <a:ext cx="324010" cy="324884"/>
+        <a:off x="3431290" y="598846"/>
+        <a:ext cx="393867" cy="394928"/>
       </dsp:txXfrm>
     </dsp:sp>
     <dsp:sp modelId="{B32D1B31-3E42-4A29-8B37-0073516D8443}">
@@ -1708,8 +1708,8 @@
       </dsp:nvSpPr>
       <dsp:spPr>
         <a:xfrm>
-          <a:off x="4361384" y="322861"/>
-          <a:ext cx="2183355" cy="1310013"/>
+          <a:off x="4259366" y="83"/>
+          <a:ext cx="2654091" cy="1592454"/>
         </a:xfrm>
         <a:prstGeom prst="roundRect">
           <a:avLst>
@@ -1796,8 +1796,8 @@
         </a:p>
       </dsp:txBody>
       <dsp:txXfrm>
-        <a:off x="4399753" y="361230"/>
-        <a:ext cx="2106617" cy="1233275"/>
+        <a:off x="4306007" y="46724"/>
+        <a:ext cx="2560809" cy="1499172"/>
       </dsp:txXfrm>
     </dsp:sp>
     <dsp:sp modelId="{933E7322-4333-415D-942D-4B6DA15AB018}">
@@ -1807,8 +1807,8 @@
       </dsp:nvSpPr>
       <dsp:spPr>
         <a:xfrm>
-          <a:off x="6736875" y="707132"/>
-          <a:ext cx="462871" cy="541472"/>
+          <a:off x="7147018" y="467203"/>
+          <a:ext cx="562667" cy="658214"/>
         </a:xfrm>
         <a:prstGeom prst="rightArrow">
           <a:avLst>
@@ -1866,8 +1866,8 @@
         </a:p>
       </dsp:txBody>
       <dsp:txXfrm>
-        <a:off x="6736875" y="815426"/>
-        <a:ext cx="324010" cy="324884"/>
+        <a:off x="7147018" y="598846"/>
+        <a:ext cx="393867" cy="394928"/>
       </dsp:txXfrm>
     </dsp:sp>
     <dsp:sp modelId="{00380C87-F618-4E01-A15F-75EFFC39D6ED}">
@@ -1877,8 +1877,8 @@
       </dsp:nvSpPr>
       <dsp:spPr>
         <a:xfrm>
-          <a:off x="7418082" y="323"/>
-          <a:ext cx="2183355" cy="1955089"/>
+          <a:off x="7975094" y="161367"/>
+          <a:ext cx="2654091" cy="1269887"/>
         </a:xfrm>
         <a:prstGeom prst="roundRect">
           <a:avLst>
@@ -1966,8 +1966,8 @@
         </a:p>
       </dsp:txBody>
       <dsp:txXfrm>
-        <a:off x="7475345" y="57586"/>
-        <a:ext cx="2068829" cy="1840563"/>
+        <a:off x="8012288" y="198561"/>
+        <a:ext cx="2579703" cy="1195499"/>
       </dsp:txXfrm>
     </dsp:sp>
     <dsp:sp modelId="{6C7EEBE4-BA21-4FDF-8038-F3227AFC7593}">
@@ -1977,8 +1977,8 @@
       </dsp:nvSpPr>
       <dsp:spPr>
         <a:xfrm rot="5400000">
-          <a:off x="8278324" y="2108248"/>
-          <a:ext cx="462871" cy="541472"/>
+          <a:off x="8978066" y="1695263"/>
+          <a:ext cx="648147" cy="658214"/>
         </a:xfrm>
         <a:prstGeom prst="rightArrow">
           <a:avLst>
@@ -2036,8 +2036,8 @@
         </a:p>
       </dsp:txBody>
       <dsp:txXfrm rot="-5400000">
-        <a:off x="8347318" y="2147549"/>
-        <a:ext cx="324884" cy="324010"/>
+        <a:off x="9104675" y="1700297"/>
+        <a:ext cx="394928" cy="453703"/>
       </dsp:txXfrm>
     </dsp:sp>
     <dsp:sp modelId="{00BD75CC-049E-4014-BD90-AA167FF0F56B}">
@@ -2047,8 +2047,8 @@
       </dsp:nvSpPr>
       <dsp:spPr>
         <a:xfrm>
-          <a:off x="7418082" y="2828755"/>
-          <a:ext cx="2183355" cy="1733396"/>
+          <a:off x="7975094" y="2654175"/>
+          <a:ext cx="2654091" cy="2107120"/>
         </a:xfrm>
         <a:prstGeom prst="roundRect">
           <a:avLst>
@@ -2156,8 +2156,8 @@
         </a:p>
       </dsp:txBody>
       <dsp:txXfrm>
-        <a:off x="7468851" y="2879524"/>
-        <a:ext cx="2081817" cy="1631858"/>
+        <a:off x="8036809" y="2715890"/>
+        <a:ext cx="2530661" cy="1983690"/>
       </dsp:txXfrm>
     </dsp:sp>
     <dsp:sp modelId="{949F5DE3-CB1A-49D4-A335-E8F4A66E5C29}">
@@ -2167,8 +2167,8 @@
       </dsp:nvSpPr>
       <dsp:spPr>
         <a:xfrm rot="10800000">
-          <a:off x="6763075" y="3424717"/>
-          <a:ext cx="462871" cy="541472"/>
+          <a:off x="7178867" y="3378627"/>
+          <a:ext cx="562667" cy="658214"/>
         </a:xfrm>
         <a:prstGeom prst="rightArrow">
           <a:avLst>
@@ -2226,8 +2226,8 @@
         </a:p>
       </dsp:txBody>
       <dsp:txXfrm rot="10800000">
-        <a:off x="6901936" y="3533011"/>
-        <a:ext cx="324010" cy="324884"/>
+        <a:off x="7347667" y="3510270"/>
+        <a:ext cx="393867" cy="394928"/>
       </dsp:txXfrm>
     </dsp:sp>
     <dsp:sp modelId="{8FE3C614-1E26-46E9-A5FD-3C0E68796D6A}">
@@ -2237,8 +2237,8 @@
       </dsp:nvSpPr>
       <dsp:spPr>
         <a:xfrm>
-          <a:off x="4361384" y="3048726"/>
-          <a:ext cx="2183355" cy="1293454"/>
+          <a:off x="4259366" y="2921572"/>
+          <a:ext cx="2654091" cy="1572326"/>
         </a:xfrm>
         <a:prstGeom prst="roundRect">
           <a:avLst>
@@ -2326,8 +2326,8 @@
         </a:p>
       </dsp:txBody>
       <dsp:txXfrm>
-        <a:off x="4399268" y="3086610"/>
-        <a:ext cx="2107587" cy="1217686"/>
+        <a:off x="4305418" y="2967624"/>
+        <a:ext cx="2561987" cy="1480222"/>
       </dsp:txXfrm>
     </dsp:sp>
     <dsp:sp modelId="{F4E68850-A9E1-4665-A644-DC7AF986C531}">
@@ -2337,8 +2337,8 @@
       </dsp:nvSpPr>
       <dsp:spPr>
         <a:xfrm rot="10800000">
-          <a:off x="3706378" y="3424717"/>
-          <a:ext cx="462871" cy="541472"/>
+          <a:off x="3463139" y="3378627"/>
+          <a:ext cx="562667" cy="658214"/>
         </a:xfrm>
         <a:prstGeom prst="rightArrow">
           <a:avLst>
@@ -2396,8 +2396,8 @@
         </a:p>
       </dsp:txBody>
       <dsp:txXfrm rot="10800000">
-        <a:off x="3845239" y="3533011"/>
-        <a:ext cx="324010" cy="324884"/>
+        <a:off x="3631939" y="3510270"/>
+        <a:ext cx="393867" cy="394928"/>
       </dsp:txXfrm>
     </dsp:sp>
     <dsp:sp modelId="{782B2E4C-2663-46E7-B760-2634A31F24D7}">
@@ -2407,8 +2407,8 @@
       </dsp:nvSpPr>
       <dsp:spPr>
         <a:xfrm>
-          <a:off x="1304687" y="2901487"/>
-          <a:ext cx="2183355" cy="1587932"/>
+          <a:off x="543638" y="2742588"/>
+          <a:ext cx="2654091" cy="1930294"/>
         </a:xfrm>
         <a:prstGeom prst="roundRect">
           <a:avLst>
@@ -2522,8 +2522,8 @@
         </a:p>
       </dsp:txBody>
       <dsp:txXfrm>
-        <a:off x="1351196" y="2947996"/>
-        <a:ext cx="2090337" cy="1494914"/>
+        <a:off x="600174" y="2799124"/>
+        <a:ext cx="2541019" cy="1817222"/>
       </dsp:txXfrm>
     </dsp:sp>
   </dsp:spTree>
@@ -3817,7 +3817,7 @@
           <a:p>
             <a:fld id="{BC696772-C6C0-4DB9-B104-9AF733F948EB}" type="datetimeFigureOut">
               <a:rPr lang="en-SG" smtClean="0"/>
-              <a:t>13/5/2026</a:t>
+              <a:t>14/5/2026</a:t>
             </a:fld>
             <a:endParaRPr lang="en-SG"/>
           </a:p>
@@ -4403,6 +4403,77 @@
               <a:rPr lang="en-GB" dirty="0"/>
               <a:t>→ less likely to be a shortage signal</a:t>
             </a:r>
+          </a:p>
+          <a:p>
+            <a:endParaRPr lang="en-GB" dirty="0"/>
+          </a:p>
+          <a:p>
+            <a:r>
+              <a:rPr lang="en-GB" dirty="0"/>
+              <a:t>The SQL helper function centralises database access. </a:t>
+            </a:r>
+          </a:p>
+          <a:p>
+            <a:r>
+              <a:rPr lang="en-GB" dirty="0"/>
+              <a:t>Each dashboard query is passed into </a:t>
+            </a:r>
+            <a:r>
+              <a:rPr lang="en-GB" sz="1200" kern="1200" dirty="0" err="1">
+                <a:solidFill>
+                  <a:schemeClr val="tx1"/>
+                </a:solidFill>
+                <a:latin typeface="+mn-lt"/>
+                <a:ea typeface="+mn-ea"/>
+                <a:cs typeface="+mn-cs"/>
+              </a:rPr>
+              <a:t>run_query</a:t>
+            </a:r>
+            <a:r>
+              <a:rPr lang="en-GB" sz="1200" kern="1200" dirty="0">
+                <a:solidFill>
+                  <a:schemeClr val="tx1"/>
+                </a:solidFill>
+                <a:latin typeface="+mn-lt"/>
+                <a:ea typeface="+mn-ea"/>
+                <a:cs typeface="+mn-cs"/>
+              </a:rPr>
+              <a:t>()</a:t>
+            </a:r>
+            <a:r>
+              <a:rPr lang="en-GB" dirty="0"/>
+              <a:t>, which opens </a:t>
+            </a:r>
+            <a:r>
+              <a:rPr lang="en-GB" dirty="0" err="1"/>
+              <a:t>DuckDB</a:t>
+            </a:r>
+            <a:r>
+              <a:rPr lang="en-GB" dirty="0"/>
+              <a:t> in read-only mode, executes the SQL, converts the result into a </a:t>
+            </a:r>
+            <a:r>
+              <a:rPr lang="en-GB" dirty="0" err="1"/>
+              <a:t>DataFrame</a:t>
+            </a:r>
+            <a:r>
+              <a:rPr lang="en-GB" dirty="0"/>
+              <a:t>, closes the connection, and returns the result to </a:t>
+            </a:r>
+            <a:r>
+              <a:rPr lang="en-GB" dirty="0" err="1"/>
+              <a:t>Streamlit</a:t>
+            </a:r>
+            <a:r>
+              <a:rPr lang="en-GB" dirty="0"/>
+              <a:t>. T</a:t>
+            </a:r>
+          </a:p>
+          <a:p>
+            <a:r>
+              <a:rPr lang="en-GB" dirty="0"/>
+              <a:t>his keeps the dashboard code cleaner and avoids repeating database connection logic in every tab.</a:t>
+            </a:r>
             <a:endParaRPr lang="en-SG" dirty="0"/>
           </a:p>
         </p:txBody>
@@ -4592,7 +4663,7 @@
           <a:p>
             <a:fld id="{A0800C99-962C-445A-A64F-3D7D7906FF04}" type="datetimeFigureOut">
               <a:rPr lang="en-SG" smtClean="0"/>
-              <a:t>13/5/2026</a:t>
+              <a:t>14/5/2026</a:t>
             </a:fld>
             <a:endParaRPr lang="en-SG"/>
           </a:p>
@@ -4792,7 +4863,7 @@
           <a:p>
             <a:fld id="{A0800C99-962C-445A-A64F-3D7D7906FF04}" type="datetimeFigureOut">
               <a:rPr lang="en-SG" smtClean="0"/>
-              <a:t>13/5/2026</a:t>
+              <a:t>14/5/2026</a:t>
             </a:fld>
             <a:endParaRPr lang="en-SG"/>
           </a:p>
@@ -5002,7 +5073,7 @@
           <a:p>
             <a:fld id="{A0800C99-962C-445A-A64F-3D7D7906FF04}" type="datetimeFigureOut">
               <a:rPr lang="en-SG" smtClean="0"/>
-              <a:t>13/5/2026</a:t>
+              <a:t>14/5/2026</a:t>
             </a:fld>
             <a:endParaRPr lang="en-SG"/>
           </a:p>
@@ -5202,7 +5273,7 @@
           <a:p>
             <a:fld id="{A0800C99-962C-445A-A64F-3D7D7906FF04}" type="datetimeFigureOut">
               <a:rPr lang="en-SG" smtClean="0"/>
-              <a:t>13/5/2026</a:t>
+              <a:t>14/5/2026</a:t>
             </a:fld>
             <a:endParaRPr lang="en-SG"/>
           </a:p>
@@ -5478,7 +5549,7 @@
           <a:p>
             <a:fld id="{A0800C99-962C-445A-A64F-3D7D7906FF04}" type="datetimeFigureOut">
               <a:rPr lang="en-SG" smtClean="0"/>
-              <a:t>13/5/2026</a:t>
+              <a:t>14/5/2026</a:t>
             </a:fld>
             <a:endParaRPr lang="en-SG"/>
           </a:p>
@@ -5746,7 +5817,7 @@
           <a:p>
             <a:fld id="{A0800C99-962C-445A-A64F-3D7D7906FF04}" type="datetimeFigureOut">
               <a:rPr lang="en-SG" smtClean="0"/>
-              <a:t>13/5/2026</a:t>
+              <a:t>14/5/2026</a:t>
             </a:fld>
             <a:endParaRPr lang="en-SG"/>
           </a:p>
@@ -6161,7 +6232,7 @@
           <a:p>
             <a:fld id="{A0800C99-962C-445A-A64F-3D7D7906FF04}" type="datetimeFigureOut">
               <a:rPr lang="en-SG" smtClean="0"/>
-              <a:t>13/5/2026</a:t>
+              <a:t>14/5/2026</a:t>
             </a:fld>
             <a:endParaRPr lang="en-SG"/>
           </a:p>
@@ -6303,7 +6374,7 @@
           <a:p>
             <a:fld id="{A0800C99-962C-445A-A64F-3D7D7906FF04}" type="datetimeFigureOut">
               <a:rPr lang="en-SG" smtClean="0"/>
-              <a:t>13/5/2026</a:t>
+              <a:t>14/5/2026</a:t>
             </a:fld>
             <a:endParaRPr lang="en-SG"/>
           </a:p>
@@ -6416,7 +6487,7 @@
           <a:p>
             <a:fld id="{A0800C99-962C-445A-A64F-3D7D7906FF04}" type="datetimeFigureOut">
               <a:rPr lang="en-SG" smtClean="0"/>
-              <a:t>13/5/2026</a:t>
+              <a:t>14/5/2026</a:t>
             </a:fld>
             <a:endParaRPr lang="en-SG"/>
           </a:p>
@@ -6729,7 +6800,7 @@
           <a:p>
             <a:fld id="{A0800C99-962C-445A-A64F-3D7D7906FF04}" type="datetimeFigureOut">
               <a:rPr lang="en-SG" smtClean="0"/>
-              <a:t>13/5/2026</a:t>
+              <a:t>14/5/2026</a:t>
             </a:fld>
             <a:endParaRPr lang="en-SG"/>
           </a:p>
@@ -7018,7 +7089,7 @@
           <a:p>
             <a:fld id="{A0800C99-962C-445A-A64F-3D7D7906FF04}" type="datetimeFigureOut">
               <a:rPr lang="en-SG" smtClean="0"/>
-              <a:t>13/5/2026</a:t>
+              <a:t>14/5/2026</a:t>
             </a:fld>
             <a:endParaRPr lang="en-SG"/>
           </a:p>
@@ -7261,7 +7332,7 @@
           <a:p>
             <a:fld id="{A0800C99-962C-445A-A64F-3D7D7906FF04}" type="datetimeFigureOut">
               <a:rPr lang="en-SG" smtClean="0"/>
-              <a:t>13/5/2026</a:t>
+              <a:t>14/5/2026</a:t>
             </a:fld>
             <a:endParaRPr lang="en-SG"/>
           </a:p>
@@ -7826,7 +7897,7 @@
           <a:p>
             <a:r>
               <a:rPr lang="en-SG" dirty="0"/>
-              <a:t>Problem, Target User &amp; Value Proposition</a:t>
+              <a:t>Problem, Target Users &amp; Value Proposition</a:t>
             </a:r>
           </a:p>
         </p:txBody>
@@ -7923,7 +7994,7 @@
                 </a:solidFill>
                 <a:effectLst/>
               </a:rPr>
-              <a:t>Problem Statement:</a:t>
+              <a:t>Problems observed</a:t>
             </a:r>
           </a:p>
           <a:p>
@@ -7957,7 +8028,7 @@
             </a:pPr>
             <a:r>
               <a:rPr lang="en-GB" sz="1800" dirty="0"/>
-              <a:t>Some job categories may have many postings or vacancies, but relatively fewer applications or views.</a:t>
+              <a:t>Some job categories may have many postings or vacancies, but relatively fewer applications or views</a:t>
             </a:r>
           </a:p>
           <a:p>
@@ -8015,7 +8086,7 @@
                 </a:solidFill>
                 <a:effectLst/>
               </a:rPr>
-              <a:t>Target Users</a:t>
+              <a:t>Who faces these problems?</a:t>
             </a:r>
             <a:endParaRPr lang="en-US" altLang="en-US" sz="1800" b="1" dirty="0"/>
           </a:p>
@@ -8151,7 +8222,7 @@
                 </a:solidFill>
                 <a:effectLst/>
               </a:rPr>
-              <a:t>Intended Outcome</a:t>
+              <a:t>Intended Outcome for this project</a:t>
             </a:r>
             <a:endParaRPr lang="en-US" altLang="en-US" sz="1800" b="1" dirty="0"/>
           </a:p>
@@ -8246,6 +8317,10 @@
               </a:spcAft>
             </a:pPr>
             <a:r>
+              <a:rPr lang="en-GB" altLang="en-US" sz="1800" dirty="0"/>
+              <a:t>Having a</a:t>
+            </a:r>
+            <a:r>
               <a:rPr kumimoji="0" lang="en-GB" altLang="en-US" sz="1800" b="0" i="0" u="none" strike="noStrike" cap="none" normalizeH="0" baseline="0" dirty="0">
                 <a:ln>
                   <a:noFill/>
@@ -8255,7 +8330,7 @@
                 </a:solidFill>
                 <a:effectLst/>
               </a:rPr>
-              <a:t>The dashboard helps users compare job demand, applicant interest, and salary attractiveness to support workforce planning, career guidance, and hiring strategy.</a:t>
+              <a:t> dashboard helps users compare job demand, applicant interest, and salary attractiveness to support workforce planning, career guidance, and hiring strategy</a:t>
             </a:r>
             <a:endParaRPr kumimoji="0" lang="en-US" altLang="en-US" sz="1800" b="0" i="0" u="none" strike="noStrike" cap="none" normalizeH="0" baseline="0" dirty="0">
               <a:ln>
@@ -8340,14 +8415,14 @@
           <p:nvPr>
             <p:extLst>
               <p:ext uri="{D42A27DB-BD31-4B8C-83A1-F6EECF244321}">
-                <p14:modId xmlns:p14="http://schemas.microsoft.com/office/powerpoint/2010/main" val="2173846995"/>
+                <p14:modId xmlns:p14="http://schemas.microsoft.com/office/powerpoint/2010/main" val="3842040706"/>
               </p:ext>
             </p:extLst>
           </p:nvPr>
         </p:nvGraphicFramePr>
         <p:xfrm>
-          <a:off x="838200" y="1590675"/>
-          <a:ext cx="10906125" cy="4562475"/>
+          <a:off x="571500" y="1391771"/>
+          <a:ext cx="11172825" cy="4761379"/>
         </p:xfrm>
         <a:graphic>
           <a:graphicData uri="http://schemas.openxmlformats.org/drawingml/2006/diagram">
@@ -8517,7 +8592,7 @@
         </p:nvSpPr>
         <p:spPr>
           <a:xfrm>
-            <a:off x="6009782" y="1786396"/>
+            <a:off x="6009782" y="1639667"/>
             <a:ext cx="5344018" cy="3323987"/>
           </a:xfrm>
           <a:prstGeom prst="rect">
@@ -8698,7 +8773,7 @@
               </a:br>
               <a:r>
                 <a:rPr lang="en-GB" sz="1400" dirty="0"/>
-                <a:t>A joined analysis view used by the dashboard.</a:t>
+                <a:t>A joined analysis view used by the dashboard</a:t>
               </a:r>
               <a:br>
                 <a:rPr lang="en-GB" sz="1400" dirty="0"/>
@@ -8890,7 +8965,7 @@
               <a:buAutoNum type="arabicPeriod"/>
             </a:pPr>
             <a:r>
-              <a:rPr lang="en-SG" sz="1800" dirty="0"/>
+              <a:rPr lang="en-SG" sz="1800" b="1" dirty="0"/>
               <a:t>Demand</a:t>
             </a:r>
           </a:p>
@@ -8920,7 +8995,7 @@
               <a:buAutoNum type="arabicPeriod"/>
             </a:pPr>
             <a:r>
-              <a:rPr lang="en-SG" sz="1800" dirty="0"/>
+              <a:rPr lang="en-SG" sz="1800" b="1" dirty="0"/>
               <a:t>Applicant Interest</a:t>
             </a:r>
           </a:p>
@@ -8950,7 +9025,7 @@
               <a:buAutoNum type="arabicPeriod"/>
             </a:pPr>
             <a:r>
-              <a:rPr lang="en-SG" sz="1800" dirty="0"/>
+              <a:rPr lang="en-SG" sz="1800" b="1" dirty="0"/>
               <a:t>Salary Context</a:t>
             </a:r>
           </a:p>
@@ -8974,7 +9049,7 @@
               <a:buAutoNum type="arabicPeriod"/>
             </a:pPr>
             <a:r>
-              <a:rPr lang="en-SG" sz="1800" dirty="0"/>
+              <a:rPr lang="en-SG" sz="1800" b="1" dirty="0"/>
               <a:t>Scoring Logic</a:t>
             </a:r>
             <a:r>
@@ -9116,7 +9191,7 @@
         </p:nvSpPr>
         <p:spPr>
           <a:xfrm>
-            <a:off x="4976812" y="1847057"/>
+            <a:off x="4923023" y="1690688"/>
             <a:ext cx="5110163" cy="2338387"/>
           </a:xfrm>
           <a:prstGeom prst="rect">
@@ -9385,7 +9460,7 @@
             </a:r>
             <a:r>
               <a:rPr lang="en-GB" sz="2000" dirty="0"/>
-              <a:t>, tables, and charts.</a:t>
+              <a:t>, tables, and charts</a:t>
             </a:r>
           </a:p>
           <a:p>
